--- a/Courses/UCLINA600-Linear-Algebra-for-Graphics/Slides/M07-Homogeneous-Coordinates.pptx
+++ b/Courses/UCLINA600-Linear-Algebra-for-Graphics/Slides/M07-Homogeneous-Coordinates.pptx
@@ -7408,7 +7408,7 @@
               </a:lnSpc>
             </a:pPr>
             <a:r>
-              <a:rPr sz="1020" b="0" i="0">
+              <a:rPr sz="857" b="0" i="0">
                 <a:solidFill>
                   <a:srgbClr val="E4E8EF"/>
                 </a:solidFill>
@@ -7424,7 +7424,7 @@
               </a:lnSpc>
             </a:pPr>
             <a:r>
-              <a:rPr sz="1020" b="0" i="0">
+              <a:rPr sz="857" b="0" i="0">
                 <a:solidFill>
                   <a:srgbClr val="E4E8EF"/>
                 </a:solidFill>
@@ -7440,7 +7440,7 @@
               </a:lnSpc>
             </a:pPr>
             <a:r>
-              <a:rPr sz="1020" b="0" i="0">
+              <a:rPr sz="857" b="0" i="0">
                 <a:solidFill>
                   <a:srgbClr val="E4E8EF"/>
                 </a:solidFill>
@@ -7456,7 +7456,7 @@
               </a:lnSpc>
             </a:pPr>
             <a:r>
-              <a:rPr sz="1020" b="0" i="0">
+              <a:rPr sz="857" b="0" i="0">
                 <a:solidFill>
                   <a:srgbClr val="E4E8EF"/>
                 </a:solidFill>
@@ -7472,7 +7472,7 @@
               </a:lnSpc>
             </a:pPr>
             <a:r>
-              <a:rPr sz="1020" b="0" i="0">
+              <a:rPr sz="857" b="0" i="0">
                 <a:solidFill>
                   <a:srgbClr val="E4E8EF"/>
                 </a:solidFill>
@@ -7488,7 +7488,7 @@
               </a:lnSpc>
             </a:pPr>
             <a:r>
-              <a:rPr sz="1020" b="0" i="0">
+              <a:rPr sz="857" b="0" i="0">
                 <a:solidFill>
                   <a:srgbClr val="E4E8EF"/>
                 </a:solidFill>
@@ -7504,7 +7504,7 @@
               </a:lnSpc>
             </a:pPr>
             <a:r>
-              <a:rPr sz="1020" b="0" i="0">
+              <a:rPr sz="857" b="0" i="0">
                 <a:solidFill>
                   <a:srgbClr val="E4E8EF"/>
                 </a:solidFill>
@@ -7520,7 +7520,7 @@
               </a:lnSpc>
             </a:pPr>
             <a:r>
-              <a:rPr sz="1020" b="0" i="0">
+              <a:rPr sz="857" b="0" i="0">
                 <a:solidFill>
                   <a:srgbClr val="E4E8EF"/>
                 </a:solidFill>
@@ -7536,7 +7536,7 @@
               </a:lnSpc>
             </a:pPr>
             <a:r>
-              <a:rPr sz="1020" b="0" i="0">
+              <a:rPr sz="857" b="0" i="0">
                 <a:solidFill>
                   <a:srgbClr val="E4E8EF"/>
                 </a:solidFill>
@@ -7552,7 +7552,7 @@
               </a:lnSpc>
             </a:pPr>
             <a:r>
-              <a:rPr sz="1020" b="0" i="0">
+              <a:rPr sz="857" b="0" i="0">
                 <a:solidFill>
                   <a:srgbClr val="E4E8EF"/>
                 </a:solidFill>
@@ -7568,7 +7568,7 @@
               </a:lnSpc>
             </a:pPr>
             <a:r>
-              <a:rPr sz="1020" b="0" i="0">
+              <a:rPr sz="857" b="0" i="0">
                 <a:solidFill>
                   <a:srgbClr val="E4E8EF"/>
                 </a:solidFill>
@@ -7584,7 +7584,7 @@
               </a:lnSpc>
             </a:pPr>
             <a:r>
-              <a:rPr sz="1020" b="0" i="0">
+              <a:rPr sz="857" b="0" i="0">
                 <a:solidFill>
                   <a:srgbClr val="E4E8EF"/>
                 </a:solidFill>
@@ -7600,7 +7600,7 @@
               </a:lnSpc>
             </a:pPr>
             <a:r>
-              <a:rPr sz="1020" b="0" i="0">
+              <a:rPr sz="857" b="0" i="0">
                 <a:solidFill>
                   <a:srgbClr val="E4E8EF"/>
                 </a:solidFill>
@@ -7616,7 +7616,7 @@
               </a:lnSpc>
             </a:pPr>
             <a:r>
-              <a:rPr sz="1020" b="0" i="0">
+              <a:rPr sz="857" b="0" i="0">
                 <a:solidFill>
                   <a:srgbClr val="E4E8EF"/>
                 </a:solidFill>
@@ -7632,7 +7632,7 @@
               </a:lnSpc>
             </a:pPr>
             <a:r>
-              <a:rPr sz="1020" b="0" i="0">
+              <a:rPr sz="857" b="0" i="0">
                 <a:solidFill>
                   <a:srgbClr val="E4E8EF"/>
                 </a:solidFill>
@@ -7648,7 +7648,7 @@
               </a:lnSpc>
             </a:pPr>
             <a:r>
-              <a:rPr sz="1020" b="0" i="0">
+              <a:rPr sz="857" b="0" i="0">
                 <a:solidFill>
                   <a:srgbClr val="E4E8EF"/>
                 </a:solidFill>
@@ -7664,7 +7664,7 @@
               </a:lnSpc>
             </a:pPr>
             <a:r>
-              <a:rPr sz="1020" b="0" i="0">
+              <a:rPr sz="857" b="0" i="0">
                 <a:solidFill>
                   <a:srgbClr val="E4E8EF"/>
                 </a:solidFill>
@@ -7680,7 +7680,7 @@
               </a:lnSpc>
             </a:pPr>
             <a:r>
-              <a:rPr sz="1020" b="0" i="0">
+              <a:rPr sz="857" b="0" i="0">
                 <a:solidFill>
                   <a:srgbClr val="E4E8EF"/>
                 </a:solidFill>
@@ -7696,13 +7696,13 @@
               </a:lnSpc>
             </a:pPr>
             <a:r>
-              <a:rPr sz="1020" b="0" i="0">
+              <a:rPr sz="857" b="0" i="0">
                 <a:solidFill>
                   <a:srgbClr val="E4E8EF"/>
                 </a:solidFill>
                 <a:latin typeface="Consolas"/>
               </a:rPr>
-              <a:t>  SO NORMALS AND LIGHT DIRECTIONS GET w = 0,</a:t>
+              <a:t>  SO LIGHT DIRECTIONS GET w = 0, and vertices</a:t>
             </a:r>
           </a:p>
           <a:p>
@@ -7712,13 +7712,13 @@
               </a:lnSpc>
             </a:pPr>
             <a:r>
-              <a:rPr sz="1020" b="0" i="0">
+              <a:rPr sz="857" b="0" i="0">
                 <a:solidFill>
                   <a:srgbClr val="E4E8EF"/>
                 </a:solidFill>
                 <a:latin typeface="Consolas"/>
               </a:rPr>
-              <a:t>  and vertices get w = 1, and you never have to</a:t>
+              <a:t>  get w = 1, and translation needs no branch.</a:t>
             </a:r>
           </a:p>
           <a:p>
@@ -7728,13 +7728,77 @@
               </a:lnSpc>
             </a:pPr>
             <a:r>
-              <a:rPr sz="1020" b="0" i="0">
+              <a:rPr sz="857" b="0" i="0">
                 <a:solidFill>
                   <a:srgbClr val="E4E8EF"/>
                 </a:solidFill>
                 <a:latin typeface="Consolas"/>
               </a:rPr>
-              <a:t>  special-case anything.</a:t>
+              <a:t> </a:t>
+            </a:r>
+          </a:p>
+          <a:p>
+            <a:pPr algn="l">
+              <a:lnSpc>
+                <a:spcPct val="105000"/>
+              </a:lnSpc>
+            </a:pPr>
+            <a:r>
+              <a:rPr sz="857" b="0" i="0">
+                <a:solidFill>
+                  <a:srgbClr val="E4E8EF"/>
+                </a:solidFill>
+                <a:latin typeface="Consolas"/>
+              </a:rPr>
+              <a:t>  NORMALS ALSO TAKE w = 0, but that settles only</a:t>
+            </a:r>
+          </a:p>
+          <a:p>
+            <a:pPr algn="l">
+              <a:lnSpc>
+                <a:spcPct val="105000"/>
+              </a:lnSpc>
+            </a:pPr>
+            <a:r>
+              <a:rPr sz="857" b="0" i="0">
+                <a:solidFill>
+                  <a:srgbClr val="E4E8EF"/>
+                </a:solidFill>
+                <a:latin typeface="Consolas"/>
+              </a:rPr>
+              <a:t>  translation. Their 3x3 part still needs the</a:t>
+            </a:r>
+          </a:p>
+          <a:p>
+            <a:pPr algn="l">
+              <a:lnSpc>
+                <a:spcPct val="105000"/>
+              </a:lnSpc>
+            </a:pPr>
+            <a:r>
+              <a:rPr sz="857" b="0" i="0">
+                <a:solidFill>
+                  <a:srgbClr val="E4E8EF"/>
+                </a:solidFill>
+                <a:latin typeface="Consolas"/>
+              </a:rPr>
+              <a:t>  inverse transpose of Module 06 -- w = 0 does</a:t>
+            </a:r>
+          </a:p>
+          <a:p>
+            <a:pPr algn="l">
+              <a:lnSpc>
+                <a:spcPct val="105000"/>
+              </a:lnSpc>
+            </a:pPr>
+            <a:r>
+              <a:rPr sz="857" b="0" i="0">
+                <a:solidFill>
+                  <a:srgbClr val="E4E8EF"/>
+                </a:solidFill>
+                <a:latin typeface="Consolas"/>
+              </a:rPr>
+              <a:t>  not rescue a normal under non-uniform scale.</a:t>
             </a:r>
           </a:p>
         </p:txBody>
